--- a/curso/pptx/S48.pptx
+++ b/curso/pptx/S48.pptx
@@ -6714,7 +6714,7 @@
                 </a:solidFill>
                 <a:latin typeface="Nunito Sans"/>
               </a:rPr>
-              <a:t>Confirmación:</a:t>
+              <a:t>确认：</a:t>
             </a:r>
             <a:r>
               <a:rPr sz="2800" b="0">
@@ -6723,7 +6723,7 @@
                 </a:solidFill>
                 <a:latin typeface="Nunito Sans"/>
               </a:rPr>
-              <a:t> buscar y recordar solo lo que me da la razón</a:t>
+              <a:t>只去找、只去记证明我是对的东西</a:t>
             </a:r>
           </a:p>
           <a:p>
@@ -6748,7 +6748,7 @@
                 </a:solidFill>
                 <a:latin typeface="Nunito Sans"/>
               </a:rPr>
-              <a:t>Halo:</a:t>
+              <a:t>光环：</a:t>
             </a:r>
             <a:r>
               <a:rPr sz="2800" b="0">
@@ -6757,7 +6757,7 @@
                 </a:solidFill>
                 <a:latin typeface="Nunito Sans"/>
               </a:rPr>
-              <a:t> juzgar a alguien entero por un solo rasgo</a:t>
+              <a:t>只凭一个特点来评判一个人的全部</a:t>
             </a:r>
           </a:p>
           <a:p>
@@ -6782,7 +6782,7 @@
                 </a:solidFill>
                 <a:latin typeface="Nunito Sans"/>
               </a:rPr>
-              <a:t>Anclaje:</a:t>
+              <a:t>锚定：</a:t>
             </a:r>
             <a:r>
               <a:rPr sz="2800" b="0">
@@ -6791,7 +6791,7 @@
                 </a:solidFill>
                 <a:latin typeface="Nunito Sans"/>
               </a:rPr>
-              <a:t> el primer número me sirve de referencia sin querer</a:t>
+              <a:t>第一个数字不自觉地成了我的参照</a:t>
             </a:r>
           </a:p>
           <a:p>
@@ -6816,7 +6816,7 @@
                 </a:solidFill>
                 <a:latin typeface="Nunito Sans"/>
               </a:rPr>
-              <a:t>Encuadre:</a:t>
+              <a:t>框架：</a:t>
             </a:r>
             <a:r>
               <a:rPr sz="2800" b="0">
@@ -6825,7 +6825,7 @@
                 </a:solidFill>
                 <a:latin typeface="Nunito Sans"/>
               </a:rPr>
-              <a:t> la forma de decir un dato cambia mi decisión</a:t>
+              <a:t>说一个数据的方式改变了我的决定</a:t>
             </a:r>
           </a:p>
           <a:p>
@@ -6850,7 +6850,7 @@
                 </a:solidFill>
                 <a:latin typeface="Nunito Sans"/>
               </a:rPr>
-              <a:t>Exceso de confianza:</a:t>
+              <a:t>过度自信：</a:t>
             </a:r>
             <a:r>
               <a:rPr sz="2800" b="0">
@@ -6859,7 +6859,7 @@
                 </a:solidFill>
                 <a:latin typeface="Nunito Sans"/>
               </a:rPr>
-              <a:t> creer que sé más de lo que sé</a:t>
+              <a:t>以为自己知道得比实际多</a:t>
             </a:r>
           </a:p>
         </p:txBody>

--- a/curso/pptx/S48.pptx
+++ b/curso/pptx/S48.pptx
@@ -4231,7 +4231,7 @@
                 </a:solidFill>
                 <a:latin typeface="Nunito Sans"/>
               </a:rPr>
-              <a:t>Dylan看到一款手机“原价600 €，现价350 €”，是他最喜欢的油管博主推荐的。他只读好评，还说：“我很懂手机；这是最划算的购买。”（编造的。）</a:t>
+              <a:t>一个男孩看到一款手机“原价600 €，现价350 €”，是他最喜欢的油管博主推荐的。他只读好评，还说：“我很懂手机；这是最划算的购买。”（编造的。）</a:t>
             </a:r>
           </a:p>
         </p:txBody>
@@ -4540,7 +4540,7 @@
                 </a:solidFill>
                 <a:latin typeface="Nunito Sans"/>
               </a:rPr>
-              <a:t>Naiara几个月前就想要一双运动鞋。她看到“原价100 €，现价60 €”。她查了三家店：它们都卖100 €。</a:t>
+              <a:t>一个女孩几个月前就想要一双运动鞋。她看到“原价100 €，现价60 €”。她查了三家店：它们都卖100 €。</a:t>
             </a:r>
           </a:p>
         </p:txBody>
